--- a/slides/Projeto_Videojogos_Final.pptx
+++ b/slides/Projeto_Videojogos_Final.pptx
@@ -119,6 +119,43 @@
     </p:ext>
   </p:extLst>
 </p:presentation>
+</file>
+
+<file path=ppt/revisionInfo.xml><?xml version="1.0" encoding="utf-8"?>
+<p1510:revInfo xmlns:a="http://schemas.openxmlformats.org/drawingml/2006/main" xmlns:r="http://schemas.openxmlformats.org/officeDocument/2006/relationships" xmlns:p1510="http://schemas.microsoft.com/office/powerpoint/2015/10/main">
+  <p1510:revLst>
+    <p1510:client id="{6E5D70BE-52FD-4AD4-A1A7-1FF799572880}" v="4" dt="2026-07-13T18:00:15.102"/>
+  </p1510:revLst>
+</p1510:revInfo>
+</file>
+
+<file path=ppt/changesInfos/changesInfo1.xml><?xml version="1.0" encoding="utf-8"?>
+<pc:chgInfo xmlns:a="http://schemas.openxmlformats.org/drawingml/2006/main" xmlns:r="http://schemas.openxmlformats.org/officeDocument/2006/relationships" xmlns:ac="http://schemas.microsoft.com/office/drawing/2013/main/command" xmlns:pc="http://schemas.microsoft.com/office/powerpoint/2013/main/command">
+  <pc:docChgLst>
+    <pc:chgData name="Bernardo Fonseca" userId="a83c14a3ff97b52f" providerId="LiveId" clId="{38902B61-4BD8-49F4-979A-F7BB9FE06498}"/>
+    <pc:docChg chg="modSld">
+      <pc:chgData name="Bernardo Fonseca" userId="a83c14a3ff97b52f" providerId="LiveId" clId="{38902B61-4BD8-49F4-979A-F7BB9FE06498}" dt="2026-07-13T18:00:07.918" v="68" actId="20577"/>
+      <pc:docMkLst>
+        <pc:docMk/>
+      </pc:docMkLst>
+      <pc:sldChg chg="modSp mod">
+        <pc:chgData name="Bernardo Fonseca" userId="a83c14a3ff97b52f" providerId="LiveId" clId="{38902B61-4BD8-49F4-979A-F7BB9FE06498}" dt="2026-07-13T18:00:07.918" v="68" actId="20577"/>
+        <pc:sldMkLst>
+          <pc:docMk/>
+          <pc:sldMk cId="0" sldId="256"/>
+        </pc:sldMkLst>
+        <pc:spChg chg="mod">
+          <ac:chgData name="Bernardo Fonseca" userId="a83c14a3ff97b52f" providerId="LiveId" clId="{38902B61-4BD8-49F4-979A-F7BB9FE06498}" dt="2026-07-13T18:00:07.918" v="68" actId="20577"/>
+          <ac:spMkLst>
+            <pc:docMk/>
+            <pc:sldMk cId="0" sldId="256"/>
+            <ac:spMk id="4" creationId="{00000000-0000-0000-0000-000000000000}"/>
+          </ac:spMkLst>
+        </pc:spChg>
+      </pc:sldChg>
+    </pc:docChg>
+  </pc:docChgLst>
+</pc:chgInfo>
 </file>
 
 <file path=ppt/notesMasters/notesMaster1.xml><?xml version="1.0" encoding="utf-8"?>
@@ -1602,9 +1639,8 @@
                   <a:srgbClr val="FFFFFF"/>
                 </a:solidFill>
               </a:rPr>
-              <a:t>Videogame Sales</a:t>
-            </a:r>
-            <a:endParaRPr lang="en-US" sz="4000" dirty="0"/>
+              <a:t>Mercado de Videojogos</a:t>
+            </a:r>
           </a:p>
           <a:p>
             <a:pPr marL="0" indent="0">
@@ -1619,7 +1655,7 @@
                   <a:srgbClr val="FFFFFF"/>
                 </a:solidFill>
               </a:rPr>
-              <a:t>Over the Years</a:t>
+              <a:t>Ao Longo dos Anos</a:t>
             </a:r>
             <a:endParaRPr lang="en-US" sz="4000" dirty="0"/>
           </a:p>
